--- a/doc/SpecifyingApplications/Requirements/pictures/workflow.pptx
+++ b/doc/SpecifyingApplications/Requirements/pictures/workflow.pptx
@@ -261,7 +261,7 @@
           <a:p>
             <a:fld id="{269BD049-28C9-4991-A187-CBD27043F3C5}" type="datetimeFigureOut">
               <a:rPr lang="de-DE" smtClean="0"/>
-              <a:t>10.03.2026</a:t>
+              <a:t>11.03.2026</a:t>
             </a:fld>
             <a:endParaRPr lang="de-DE"/>
           </a:p>
@@ -459,7 +459,7 @@
           <a:p>
             <a:fld id="{269BD049-28C9-4991-A187-CBD27043F3C5}" type="datetimeFigureOut">
               <a:rPr lang="de-DE" smtClean="0"/>
-              <a:t>10.03.2026</a:t>
+              <a:t>11.03.2026</a:t>
             </a:fld>
             <a:endParaRPr lang="de-DE"/>
           </a:p>
@@ -667,7 +667,7 @@
           <a:p>
             <a:fld id="{269BD049-28C9-4991-A187-CBD27043F3C5}" type="datetimeFigureOut">
               <a:rPr lang="de-DE" smtClean="0"/>
-              <a:t>10.03.2026</a:t>
+              <a:t>11.03.2026</a:t>
             </a:fld>
             <a:endParaRPr lang="de-DE"/>
           </a:p>
@@ -865,7 +865,7 @@
           <a:p>
             <a:fld id="{269BD049-28C9-4991-A187-CBD27043F3C5}" type="datetimeFigureOut">
               <a:rPr lang="de-DE" smtClean="0"/>
-              <a:t>10.03.2026</a:t>
+              <a:t>11.03.2026</a:t>
             </a:fld>
             <a:endParaRPr lang="de-DE"/>
           </a:p>
@@ -1140,7 +1140,7 @@
           <a:p>
             <a:fld id="{269BD049-28C9-4991-A187-CBD27043F3C5}" type="datetimeFigureOut">
               <a:rPr lang="de-DE" smtClean="0"/>
-              <a:t>10.03.2026</a:t>
+              <a:t>11.03.2026</a:t>
             </a:fld>
             <a:endParaRPr lang="de-DE"/>
           </a:p>
@@ -1405,7 +1405,7 @@
           <a:p>
             <a:fld id="{269BD049-28C9-4991-A187-CBD27043F3C5}" type="datetimeFigureOut">
               <a:rPr lang="de-DE" smtClean="0"/>
-              <a:t>10.03.2026</a:t>
+              <a:t>11.03.2026</a:t>
             </a:fld>
             <a:endParaRPr lang="de-DE"/>
           </a:p>
@@ -1817,7 +1817,7 @@
           <a:p>
             <a:fld id="{269BD049-28C9-4991-A187-CBD27043F3C5}" type="datetimeFigureOut">
               <a:rPr lang="de-DE" smtClean="0"/>
-              <a:t>10.03.2026</a:t>
+              <a:t>11.03.2026</a:t>
             </a:fld>
             <a:endParaRPr lang="de-DE"/>
           </a:p>
@@ -1958,7 +1958,7 @@
           <a:p>
             <a:fld id="{269BD049-28C9-4991-A187-CBD27043F3C5}" type="datetimeFigureOut">
               <a:rPr lang="de-DE" smtClean="0"/>
-              <a:t>10.03.2026</a:t>
+              <a:t>11.03.2026</a:t>
             </a:fld>
             <a:endParaRPr lang="de-DE"/>
           </a:p>
@@ -2071,7 +2071,7 @@
           <a:p>
             <a:fld id="{269BD049-28C9-4991-A187-CBD27043F3C5}" type="datetimeFigureOut">
               <a:rPr lang="de-DE" smtClean="0"/>
-              <a:t>10.03.2026</a:t>
+              <a:t>11.03.2026</a:t>
             </a:fld>
             <a:endParaRPr lang="de-DE"/>
           </a:p>
@@ -2382,7 +2382,7 @@
           <a:p>
             <a:fld id="{269BD049-28C9-4991-A187-CBD27043F3C5}" type="datetimeFigureOut">
               <a:rPr lang="de-DE" smtClean="0"/>
-              <a:t>10.03.2026</a:t>
+              <a:t>11.03.2026</a:t>
             </a:fld>
             <a:endParaRPr lang="de-DE"/>
           </a:p>
@@ -2670,7 +2670,7 @@
           <a:p>
             <a:fld id="{269BD049-28C9-4991-A187-CBD27043F3C5}" type="datetimeFigureOut">
               <a:rPr lang="de-DE" smtClean="0"/>
-              <a:t>10.03.2026</a:t>
+              <a:t>11.03.2026</a:t>
             </a:fld>
             <a:endParaRPr lang="de-DE"/>
           </a:p>
@@ -2911,7 +2911,7 @@
           <a:p>
             <a:fld id="{269BD049-28C9-4991-A187-CBD27043F3C5}" type="datetimeFigureOut">
               <a:rPr lang="de-DE" smtClean="0"/>
-              <a:t>10.03.2026</a:t>
+              <a:t>11.03.2026</a:t>
             </a:fld>
             <a:endParaRPr lang="de-DE"/>
           </a:p>
@@ -6974,7 +6974,7 @@
         <p:spPr>
           <a:xfrm>
             <a:off x="8884740" y="5442768"/>
-            <a:ext cx="1640193" cy="461665"/>
+            <a:ext cx="1556836" cy="461665"/>
           </a:xfrm>
           <a:prstGeom prst="rect">
             <a:avLst/>
@@ -7009,7 +7009,7 @@
             </a:pPr>
             <a:r>
               <a:rPr lang="de-DE" sz="800" b="1"/>
-              <a:t>Fullfill acceptance criteria</a:t>
+              <a:t>Fulfill acceptance criteria</a:t>
             </a:r>
           </a:p>
         </p:txBody>
@@ -10836,7 +10836,7 @@
         <p:spPr>
           <a:xfrm>
             <a:off x="8858897" y="5442768"/>
-            <a:ext cx="1640193" cy="461665"/>
+            <a:ext cx="1556836" cy="461665"/>
           </a:xfrm>
           <a:prstGeom prst="rect">
             <a:avLst/>
@@ -10871,7 +10871,7 @@
             </a:pPr>
             <a:r>
               <a:rPr lang="de-DE" sz="800" b="1"/>
-              <a:t>Fullfill acceptance criteria</a:t>
+              <a:t>Fulfill acceptance criteria</a:t>
             </a:r>
           </a:p>
         </p:txBody>
